--- a/doc/KerMLSupportStatus.pptx
+++ b/doc/KerMLSupportStatus.pptx
@@ -261,7 +261,7 @@
           <a:p>
             <a:fld id="{AE355358-13CE-4FC8-8BD2-8FF4CC6CFEB0}" type="datetimeFigureOut">
               <a:rPr lang="en-US" smtClean="0"/>
-              <a:t>9/19/2024</a:t>
+              <a:t>11/3/2024</a:t>
             </a:fld>
             <a:endParaRPr lang="en-US"/>
           </a:p>
@@ -461,7 +461,7 @@
           <a:p>
             <a:fld id="{AE355358-13CE-4FC8-8BD2-8FF4CC6CFEB0}" type="datetimeFigureOut">
               <a:rPr lang="en-US" smtClean="0"/>
-              <a:t>9/19/2024</a:t>
+              <a:t>11/3/2024</a:t>
             </a:fld>
             <a:endParaRPr lang="en-US"/>
           </a:p>
@@ -671,7 +671,7 @@
           <a:p>
             <a:fld id="{AE355358-13CE-4FC8-8BD2-8FF4CC6CFEB0}" type="datetimeFigureOut">
               <a:rPr lang="en-US" smtClean="0"/>
-              <a:t>9/19/2024</a:t>
+              <a:t>11/3/2024</a:t>
             </a:fld>
             <a:endParaRPr lang="en-US"/>
           </a:p>
@@ -871,7 +871,7 @@
           <a:p>
             <a:fld id="{AE355358-13CE-4FC8-8BD2-8FF4CC6CFEB0}" type="datetimeFigureOut">
               <a:rPr lang="en-US" smtClean="0"/>
-              <a:t>9/19/2024</a:t>
+              <a:t>11/3/2024</a:t>
             </a:fld>
             <a:endParaRPr lang="en-US"/>
           </a:p>
@@ -1147,7 +1147,7 @@
           <a:p>
             <a:fld id="{AE355358-13CE-4FC8-8BD2-8FF4CC6CFEB0}" type="datetimeFigureOut">
               <a:rPr lang="en-US" smtClean="0"/>
-              <a:t>9/19/2024</a:t>
+              <a:t>11/3/2024</a:t>
             </a:fld>
             <a:endParaRPr lang="en-US"/>
           </a:p>
@@ -1415,7 +1415,7 @@
           <a:p>
             <a:fld id="{AE355358-13CE-4FC8-8BD2-8FF4CC6CFEB0}" type="datetimeFigureOut">
               <a:rPr lang="en-US" smtClean="0"/>
-              <a:t>9/19/2024</a:t>
+              <a:t>11/3/2024</a:t>
             </a:fld>
             <a:endParaRPr lang="en-US"/>
           </a:p>
@@ -1830,7 +1830,7 @@
           <a:p>
             <a:fld id="{AE355358-13CE-4FC8-8BD2-8FF4CC6CFEB0}" type="datetimeFigureOut">
               <a:rPr lang="en-US" smtClean="0"/>
-              <a:t>9/19/2024</a:t>
+              <a:t>11/3/2024</a:t>
             </a:fld>
             <a:endParaRPr lang="en-US"/>
           </a:p>
@@ -1972,7 +1972,7 @@
           <a:p>
             <a:fld id="{AE355358-13CE-4FC8-8BD2-8FF4CC6CFEB0}" type="datetimeFigureOut">
               <a:rPr lang="en-US" smtClean="0"/>
-              <a:t>9/19/2024</a:t>
+              <a:t>11/3/2024</a:t>
             </a:fld>
             <a:endParaRPr lang="en-US"/>
           </a:p>
@@ -2085,7 +2085,7 @@
           <a:p>
             <a:fld id="{AE355358-13CE-4FC8-8BD2-8FF4CC6CFEB0}" type="datetimeFigureOut">
               <a:rPr lang="en-US" smtClean="0"/>
-              <a:t>9/19/2024</a:t>
+              <a:t>11/3/2024</a:t>
             </a:fld>
             <a:endParaRPr lang="en-US"/>
           </a:p>
@@ -2398,7 +2398,7 @@
           <a:p>
             <a:fld id="{AE355358-13CE-4FC8-8BD2-8FF4CC6CFEB0}" type="datetimeFigureOut">
               <a:rPr lang="en-US" smtClean="0"/>
-              <a:t>9/19/2024</a:t>
+              <a:t>11/3/2024</a:t>
             </a:fld>
             <a:endParaRPr lang="en-US"/>
           </a:p>
@@ -2687,7 +2687,7 @@
           <a:p>
             <a:fld id="{AE355358-13CE-4FC8-8BD2-8FF4CC6CFEB0}" type="datetimeFigureOut">
               <a:rPr lang="en-US" smtClean="0"/>
-              <a:t>9/19/2024</a:t>
+              <a:t>11/3/2024</a:t>
             </a:fld>
             <a:endParaRPr lang="en-US"/>
           </a:p>
@@ -2930,7 +2930,7 @@
           <a:p>
             <a:fld id="{AE355358-13CE-4FC8-8BD2-8FF4CC6CFEB0}" type="datetimeFigureOut">
               <a:rPr lang="en-US" smtClean="0"/>
-              <a:t>9/19/2024</a:t>
+              <a:t>11/3/2024</a:t>
             </a:fld>
             <a:endParaRPr lang="en-US"/>
           </a:p>
@@ -3369,7 +3369,7 @@
         </p:blipFill>
         <p:spPr>
           <a:xfrm>
-            <a:off x="2248786" y="1583232"/>
+            <a:off x="2248786" y="1571390"/>
             <a:ext cx="7941608" cy="4790985"/>
           </a:xfrm>
           <a:prstGeom prst="rect">
@@ -3419,7 +3419,7 @@
         </p:nvSpPr>
         <p:spPr>
           <a:xfrm>
-            <a:off x="3886200" y="1515140"/>
+            <a:off x="3988841" y="1515140"/>
             <a:ext cx="4577316" cy="2317392"/>
           </a:xfrm>
           <a:prstGeom prst="rect">
@@ -3473,71 +3473,8 @@
         </p:nvSpPr>
         <p:spPr>
           <a:xfrm>
-            <a:off x="3999763" y="4800098"/>
-            <a:ext cx="6190630" cy="1154026"/>
-          </a:xfrm>
-          <a:prstGeom prst="rect">
-            <a:avLst/>
-          </a:prstGeom>
-          <a:solidFill>
-            <a:schemeClr val="accent4">
-              <a:lumMod val="40000"/>
-              <a:lumOff val="60000"/>
-              <a:alpha val="20000"/>
-            </a:schemeClr>
-          </a:solidFill>
-          <a:ln w="19050">
-            <a:noFill/>
-          </a:ln>
-        </p:spPr>
-        <p:style>
-          <a:lnRef idx="2">
-            <a:schemeClr val="accent1">
-              <a:shade val="50000"/>
-            </a:schemeClr>
-          </a:lnRef>
-          <a:fillRef idx="1">
-            <a:schemeClr val="accent1"/>
-          </a:fillRef>
-          <a:effectRef idx="0">
-            <a:schemeClr val="accent1"/>
-          </a:effectRef>
-          <a:fontRef idx="minor">
-            <a:schemeClr val="lt1"/>
-          </a:fontRef>
-        </p:style>
-        <p:txBody>
-          <a:bodyPr rtlCol="0" anchor="ctr"/>
-          <a:lstStyle/>
-          <a:p>
-            <a:pPr algn="ctr"/>
-            <a:endParaRPr lang="en-US" dirty="0">
-              <a:solidFill>
-                <a:schemeClr val="accent4">
-                  <a:lumMod val="40000"/>
-                  <a:lumOff val="60000"/>
-                </a:schemeClr>
-              </a:solidFill>
-            </a:endParaRPr>
-          </a:p>
-        </p:txBody>
-      </p:sp>
-      <p:sp>
-        <p:nvSpPr>
-          <p:cNvPr id="10" name="Rechteck 9">
-            <a:extLst>
-              <a:ext uri="{FF2B5EF4-FFF2-40B4-BE49-F238E27FC236}">
-                <a16:creationId xmlns:a16="http://schemas.microsoft.com/office/drawing/2014/main" id="{F2753B6D-550F-4AE1-BEC5-60F21A80D697}"/>
-              </a:ext>
-            </a:extLst>
-          </p:cNvPr>
-          <p:cNvSpPr/>
-          <p:nvPr/>
-        </p:nvSpPr>
-        <p:spPr>
-          <a:xfrm>
-            <a:off x="4963349" y="3900624"/>
-            <a:ext cx="790264" cy="899473"/>
+            <a:off x="3999763" y="5205934"/>
+            <a:ext cx="6190630" cy="748189"/>
           </a:xfrm>
           <a:prstGeom prst="rect">
             <a:avLst/>
@@ -3654,7 +3591,7 @@
         <p:spPr>
           <a:xfrm>
             <a:off x="6965122" y="3918809"/>
-            <a:ext cx="790264" cy="881288"/>
+            <a:ext cx="790264" cy="577371"/>
           </a:xfrm>
           <a:prstGeom prst="rect">
             <a:avLst/>
@@ -3778,7 +3715,7 @@
         </p:nvSpPr>
         <p:spPr>
           <a:xfrm>
-            <a:off x="10190393" y="4813103"/>
+            <a:off x="10190392" y="5100111"/>
             <a:ext cx="1644937" cy="276999"/>
           </a:xfrm>
           <a:prstGeom prst="rect">
@@ -3829,8 +3766,8 @@
         </p:nvSpPr>
         <p:spPr>
           <a:xfrm>
-            <a:off x="2623930" y="3338623"/>
-            <a:ext cx="1262270" cy="493909"/>
+            <a:off x="2623929" y="3338621"/>
+            <a:ext cx="1364911" cy="493909"/>
           </a:xfrm>
           <a:prstGeom prst="rect">
             <a:avLst/>
@@ -3920,6 +3857,186 @@
           <a:p>
             <a:pPr algn="ctr"/>
             <a:endParaRPr lang="en-US" dirty="0"/>
+          </a:p>
+        </p:txBody>
+      </p:sp>
+      <p:sp>
+        <p:nvSpPr>
+          <p:cNvPr id="7" name="Rechteck 6">
+            <a:extLst>
+              <a:ext uri="{FF2B5EF4-FFF2-40B4-BE49-F238E27FC236}">
+                <a16:creationId xmlns:a16="http://schemas.microsoft.com/office/drawing/2014/main" id="{02B07702-35EB-6124-31D8-1922E5BF3DF7}"/>
+              </a:ext>
+            </a:extLst>
+          </p:cNvPr>
+          <p:cNvSpPr/>
+          <p:nvPr/>
+        </p:nvSpPr>
+        <p:spPr>
+          <a:xfrm>
+            <a:off x="2248786" y="3832530"/>
+            <a:ext cx="3552929" cy="1325563"/>
+          </a:xfrm>
+          <a:prstGeom prst="rect">
+            <a:avLst/>
+          </a:prstGeom>
+          <a:solidFill>
+            <a:srgbClr val="70AD47">
+              <a:alpha val="20000"/>
+            </a:srgbClr>
+          </a:solidFill>
+          <a:ln w="19050">
+            <a:noFill/>
+          </a:ln>
+        </p:spPr>
+        <p:style>
+          <a:lnRef idx="2">
+            <a:schemeClr val="accent1">
+              <a:shade val="50000"/>
+            </a:schemeClr>
+          </a:lnRef>
+          <a:fillRef idx="1">
+            <a:schemeClr val="accent1"/>
+          </a:fillRef>
+          <a:effectRef idx="0">
+            <a:schemeClr val="accent1"/>
+          </a:effectRef>
+          <a:fontRef idx="minor">
+            <a:schemeClr val="lt1"/>
+          </a:fontRef>
+        </p:style>
+        <p:txBody>
+          <a:bodyPr rtlCol="0" anchor="ctr"/>
+          <a:lstStyle/>
+          <a:p>
+            <a:pPr algn="ctr"/>
+            <a:endParaRPr lang="en-US" dirty="0"/>
+          </a:p>
+        </p:txBody>
+      </p:sp>
+      <p:sp>
+        <p:nvSpPr>
+          <p:cNvPr id="8" name="Rechteck 7">
+            <a:extLst>
+              <a:ext uri="{FF2B5EF4-FFF2-40B4-BE49-F238E27FC236}">
+                <a16:creationId xmlns:a16="http://schemas.microsoft.com/office/drawing/2014/main" id="{970BD0A5-A259-325C-7C3E-9A56C9284179}"/>
+              </a:ext>
+            </a:extLst>
+          </p:cNvPr>
+          <p:cNvSpPr/>
+          <p:nvPr/>
+        </p:nvSpPr>
+        <p:spPr>
+          <a:xfrm>
+            <a:off x="9253780" y="3880372"/>
+            <a:ext cx="936613" cy="577371"/>
+          </a:xfrm>
+          <a:prstGeom prst="rect">
+            <a:avLst/>
+          </a:prstGeom>
+          <a:solidFill>
+            <a:schemeClr val="accent4">
+              <a:lumMod val="40000"/>
+              <a:lumOff val="60000"/>
+              <a:alpha val="20000"/>
+            </a:schemeClr>
+          </a:solidFill>
+          <a:ln w="19050">
+            <a:noFill/>
+          </a:ln>
+        </p:spPr>
+        <p:style>
+          <a:lnRef idx="2">
+            <a:schemeClr val="accent1">
+              <a:shade val="50000"/>
+            </a:schemeClr>
+          </a:lnRef>
+          <a:fillRef idx="1">
+            <a:schemeClr val="accent1"/>
+          </a:fillRef>
+          <a:effectRef idx="0">
+            <a:schemeClr val="accent1"/>
+          </a:effectRef>
+          <a:fontRef idx="minor">
+            <a:schemeClr val="lt1"/>
+          </a:fontRef>
+        </p:style>
+        <p:txBody>
+          <a:bodyPr rtlCol="0" anchor="ctr"/>
+          <a:lstStyle/>
+          <a:p>
+            <a:pPr algn="ctr"/>
+            <a:endParaRPr lang="en-US" dirty="0">
+              <a:solidFill>
+                <a:schemeClr val="accent4">
+                  <a:lumMod val="40000"/>
+                  <a:lumOff val="60000"/>
+                </a:schemeClr>
+              </a:solidFill>
+            </a:endParaRPr>
+          </a:p>
+        </p:txBody>
+      </p:sp>
+      <p:sp>
+        <p:nvSpPr>
+          <p:cNvPr id="16" name="Rechteck 15">
+            <a:extLst>
+              <a:ext uri="{FF2B5EF4-FFF2-40B4-BE49-F238E27FC236}">
+                <a16:creationId xmlns:a16="http://schemas.microsoft.com/office/drawing/2014/main" id="{92669D7E-5305-B4D3-F2DD-5094ADD6CE90}"/>
+              </a:ext>
+            </a:extLst>
+          </p:cNvPr>
+          <p:cNvSpPr/>
+          <p:nvPr/>
+        </p:nvSpPr>
+        <p:spPr>
+          <a:xfrm>
+            <a:off x="6051883" y="4457744"/>
+            <a:ext cx="4138507" cy="748189"/>
+          </a:xfrm>
+          <a:prstGeom prst="rect">
+            <a:avLst/>
+          </a:prstGeom>
+          <a:solidFill>
+            <a:schemeClr val="accent4">
+              <a:lumMod val="40000"/>
+              <a:lumOff val="60000"/>
+              <a:alpha val="20000"/>
+            </a:schemeClr>
+          </a:solidFill>
+          <a:ln w="19050">
+            <a:noFill/>
+          </a:ln>
+        </p:spPr>
+        <p:style>
+          <a:lnRef idx="2">
+            <a:schemeClr val="accent1">
+              <a:shade val="50000"/>
+            </a:schemeClr>
+          </a:lnRef>
+          <a:fillRef idx="1">
+            <a:schemeClr val="accent1"/>
+          </a:fillRef>
+          <a:effectRef idx="0">
+            <a:schemeClr val="accent1"/>
+          </a:effectRef>
+          <a:fontRef idx="minor">
+            <a:schemeClr val="lt1"/>
+          </a:fontRef>
+        </p:style>
+        <p:txBody>
+          <a:bodyPr rtlCol="0" anchor="ctr"/>
+          <a:lstStyle/>
+          <a:p>
+            <a:pPr algn="ctr"/>
+            <a:endParaRPr lang="en-US" dirty="0">
+              <a:solidFill>
+                <a:schemeClr val="accent4">
+                  <a:lumMod val="40000"/>
+                  <a:lumOff val="60000"/>
+                </a:schemeClr>
+              </a:solidFill>
+            </a:endParaRPr>
           </a:p>
         </p:txBody>
       </p:sp>
